--- a/dist/초2/사회·역사/마을과공동체/초2_사회·역사_마을과공동체_02_서로돕는마을사람들_학생용.pptx
+++ b/dist/초2/사회·역사/마을과공동체/초2_사회·역사_마을과공동체_02_서로돕는마을사람들_학생용.pptx
@@ -120,13 +120,13 @@
   <p:extLst>
     <p:ext uri="{521415D9-36F7-43E2-AB2F-B90AF26B5E84}">
       <p14:sectionLst xmlns:p14="http://schemas.microsoft.com/office/powerpoint/2010/main">
-        <p14:section name="도입" id="{3a7861d4-2736-d106-f0af-12643d5e42bf}">
+        <p14:section name="도입" id="{0a208709-903d-7400-24eb-5aee26abfee1}">
           <p14:sldIdLst>
             <p14:sldId id="256"/>
             <p14:sldId id="257"/>
           </p14:sldIdLst>
         </p14:section>
-        <p14:section name="개념" id="{10696215-f668-d59c-308b-aa7c149e7c3b}">
+        <p14:section name="개념" id="{55d77d6a-c938-5a42-d625-6858bac703f8}">
           <p14:sldIdLst>
             <p14:sldId id="258"/>
             <p14:sldId id="259"/>
@@ -134,7 +134,7 @@
             <p14:sldId id="263"/>
           </p14:sldIdLst>
         </p14:section>
-        <p14:section name="연습" id="{8a41d131-206b-2f22-0644-5d707d378536}">
+        <p14:section name="연습" id="{3b0028b1-3c73-7a73-4252-d646b02da4d6}">
           <p14:sldIdLst>
             <p14:sldId id="261"/>
             <p14:sldId id="262"/>
@@ -142,24 +142,24 @@
             <p14:sldId id="265"/>
           </p14:sldIdLst>
         </p14:section>
-        <p14:section name="개념" id="{7dffaf06-f422-fb56-664e-2b18200a99ba}">
+        <p14:section name="개념" id="{5b831057-1d98-8523-4bfb-42037aa2defd}">
           <p14:sldIdLst/>
         </p14:section>
-        <p14:section name="연습" id="{bc7f1154-51bc-665a-88ed-343f70d8708f}">
+        <p14:section name="연습" id="{073f2fd3-f70b-bcdc-5f69-1f3746723f73}">
           <p14:sldIdLst/>
         </p14:section>
-        <p14:section name="확인" id="{8e9a6748-ca97-1839-175f-e3be99f11fe9}">
+        <p14:section name="확인" id="{7a0c3f72-ebb6-c61a-3074-7d7e6fa5d29a}">
           <p14:sldIdLst>
             <p14:sldId id="266"/>
             <p14:sldId id="267"/>
           </p14:sldIdLst>
         </p14:section>
-        <p14:section name="정리" id="{f25a830f-c47d-2e90-9ed1-83dc586633a0}">
+        <p14:section name="정리" id="{5c3f0c6e-d8d3-b0db-1ce1-0f48ed5d8c98}">
           <p14:sldIdLst>
             <p14:sldId id="268"/>
           </p14:sldIdLst>
         </p14:section>
-        <p14:section name="보충" id="{ab78c90a-ec29-79d7-bd8d-dc6ade51644e}">
+        <p14:section name="보충" id="{462f6aa6-0094-8942-84d2-1317ed1f4ba4}">
           <p14:sldIdLst>
             <p14:sldId id="269"/>
           </p14:sldIdLst>
